--- a/assets/pptx/catalog-581.pptx
+++ b/assets/pptx/catalog-581.pptx
@@ -3249,7 +3249,7 @@
                 <a:ea typeface="Ebrima"/>
                 <a:cs typeface="Ebrima"/>
               </a:rPr>
-              <a:t>ምህረቱ ገነነ በላዬ (2x)</a:t>
+              <a:t>ምህረቱ ገነነ በላዬ 2x</a:t>
             </a:r>
           </a:p>
           <a:p>
@@ -3267,7 +3267,7 @@
                 <a:ea typeface="Ebrima"/>
                 <a:cs typeface="Ebrima"/>
               </a:rPr>
-              <a:t>ባርኮቱ ገነነ በላዬ (2x)</a:t>
+              <a:t>ባርኮቱ ገነነ በላዬ 2x</a:t>
             </a:r>
           </a:p>
           <a:p>
@@ -3285,7 +3285,7 @@
                 <a:ea typeface="Ebrima"/>
                 <a:cs typeface="Ebrima"/>
               </a:rPr>
-              <a:t>ምህረቱ ገነነ በላዬ (2x)</a:t>
+              <a:t>ምህረቱ ገነነ በላዬ 2x</a:t>
             </a:r>
           </a:p>
           <a:p>
@@ -3303,7 +3303,7 @@
                 <a:ea typeface="Ebrima"/>
                 <a:cs typeface="Ebrima"/>
               </a:rPr>
-              <a:t>ባርኮቱ ገነነ በላዬ (2x)</a:t>
+              <a:t>ባርኮቱ ገነነ በላዬ 2x</a:t>
             </a:r>
           </a:p>
         </p:txBody>
@@ -3370,7 +3370,7 @@
                 <a:ea typeface="Ebrima"/>
                 <a:cs typeface="Ebrima"/>
               </a:rPr>
-              <a:t>ምህረቱ ገነነ በላዬ (2x)</a:t>
+              <a:t>ምህረቱ ገነነ በላዬ 2x</a:t>
             </a:r>
           </a:p>
           <a:p>
@@ -3388,7 +3388,7 @@
                 <a:ea typeface="Ebrima"/>
                 <a:cs typeface="Ebrima"/>
               </a:rPr>
-              <a:t>ባርኮቱ ገነነ በላዬ (2x)</a:t>
+              <a:t>ባርኮቱ ገነነ በላዬ 2x</a:t>
             </a:r>
           </a:p>
         </p:txBody>
@@ -3473,7 +3473,7 @@
                 <a:ea typeface="Ebrima"/>
                 <a:cs typeface="Ebrima"/>
               </a:rPr>
-              <a:t>እጁ ያጠግባል እጁ ያጠግባል (2x)</a:t>
+              <a:t>እጁ ያጠግባል እጁ ያጠግባል 2x</a:t>
             </a:r>
           </a:p>
           <a:p>
@@ -3594,7 +3594,7 @@
                 <a:ea typeface="Ebrima"/>
                 <a:cs typeface="Ebrima"/>
               </a:rPr>
-              <a:t>ምህረቱ ገነነ በላዬ (2x)</a:t>
+              <a:t>ምህረቱ ገነነ በላዬ 2x</a:t>
             </a:r>
           </a:p>
           <a:p>
@@ -3612,7 +3612,7 @@
                 <a:ea typeface="Ebrima"/>
                 <a:cs typeface="Ebrima"/>
               </a:rPr>
-              <a:t>ባርኮቱ ገነነ በላዬ (2x)</a:t>
+              <a:t>ባርኮቱ ገነነ በላዬ 2x</a:t>
             </a:r>
           </a:p>
         </p:txBody>
@@ -4047,7 +4047,7 @@
                 <a:ea typeface="Ebrima"/>
                 <a:cs typeface="Ebrima"/>
               </a:rPr>
-              <a:t>ለእኔስ ሰጥተሃል ለእኔ ሰጥተሃል (2x)</a:t>
+              <a:t>ለእኔስ ሰጥተሃል ለእኔ ሰጥተሃል 2x</a:t>
             </a:r>
           </a:p>
         </p:txBody>
@@ -4132,7 +4132,7 @@
                 <a:ea typeface="Ebrima"/>
                 <a:cs typeface="Ebrima"/>
               </a:rPr>
-              <a:t>አንተ/ከላይ ነህና የብርሃናት አባት (2x)</a:t>
+              <a:t>አንተ/ከላይ ነህና የብርሃናት አባት 2x</a:t>
             </a:r>
           </a:p>
         </p:txBody>
@@ -4199,7 +4199,7 @@
                 <a:ea typeface="Ebrima"/>
                 <a:cs typeface="Ebrima"/>
               </a:rPr>
-              <a:t>አመልከዋለሁ አመልከዋለሁ (3x)</a:t>
+              <a:t>አመልከዋለሁ አመልከዋለሁ 3x</a:t>
             </a:r>
           </a:p>
         </p:txBody>
